--- a/assets/TCS302/Unit-2/Lecture13_Circular_Queue.pptx
+++ b/assets/TCS302/Unit-2/Lecture13_Circular_Queue.pptx
@@ -2418,7 +2418,7 @@
         </p:nvGraphicFramePr>
         <p:xfrm>
           <a:off x="457200" y="1188720"/>
-          <a:ext cx="8229600" cy="914400"/>
+          <a:ext cx="8229600" cy="3072384"/>
         </p:xfrm>
         <a:graphic>
           <a:graphicData uri="http://schemas.openxmlformats.org/drawingml/2006/table">
@@ -5228,7 +5228,7 @@
         </p:nvGraphicFramePr>
         <p:xfrm>
           <a:off x="457200" y="1280160"/>
-          <a:ext cx="8229600" cy="914400"/>
+          <a:ext cx="8229600" cy="2194560"/>
         </p:xfrm>
         <a:graphic>
           <a:graphicData uri="http://schemas.openxmlformats.org/drawingml/2006/table">
@@ -6348,90 +6348,6 @@
           </a:graphicData>
         </a:graphic>
       </p:graphicFrame>
-      <p:sp>
-        <p:nvSpPr>
-          <p:cNvPr id="7" name="Shape 4"/>
-          <p:cNvSpPr/>
-          <p:nvPr/>
-        </p:nvSpPr>
-        <p:spPr>
-          <a:xfrm>
-            <a:off x="457200" y="3566160"/>
-            <a:ext cx="8229600" cy="685800"/>
-          </a:xfrm>
-          <a:prstGeom prst="roundRect">
-            <a:avLst>
-              <a:gd name="adj" fmla="val 9333"/>
-            </a:avLst>
-          </a:prstGeom>
-          <a:solidFill>
-            <a:srgbClr val="EEF3FB"/>
-          </a:solidFill>
-          <a:ln w="12700">
-            <a:solidFill>
-              <a:srgbClr val="1E2761"/>
-            </a:solidFill>
-            <a:prstDash val="solid"/>
-          </a:ln>
-        </p:spPr>
-        <p:txBody>
-          <a:bodyPr/>
-          <a:lstStyle/>
-          <a:p>
-            <a:endParaRPr lang="en-IN"/>
-          </a:p>
-        </p:txBody>
-      </p:sp>
-      <p:sp>
-        <p:nvSpPr>
-          <p:cNvPr id="8" name="Text 5"/>
-          <p:cNvSpPr/>
-          <p:nvPr/>
-        </p:nvSpPr>
-        <p:spPr>
-          <a:xfrm>
-            <a:off x="640080" y="3566160"/>
-            <a:ext cx="7863840" cy="685800"/>
-          </a:xfrm>
-          <a:prstGeom prst="rect">
-            <a:avLst/>
-          </a:prstGeom>
-          <a:noFill/>
-          <a:ln/>
-        </p:spPr>
-        <p:txBody>
-          <a:bodyPr wrap="square" lIns="0" tIns="0" rIns="0" bIns="0" rtlCol="0" anchor="ctr"/>
-          <a:lstStyle/>
-          <a:p>
-            <a:pPr marL="0" indent="0">
-              <a:buNone/>
-            </a:pPr>
-            <a:r>
-              <a:rPr lang="en-US" sz="1200" b="1" dirty="0">
-                <a:solidFill>
-                  <a:srgbClr val="1E2761"/>
-                </a:solidFill>
-                <a:latin typeface="Calibri" pitchFamily="34" charset="0"/>
-                <a:ea typeface="Calibri" pitchFamily="34" charset="-122"/>
-                <a:cs typeface="Calibri" pitchFamily="34" charset="-120"/>
-              </a:rPr>
-              <a:t>ASK   </a:t>
-            </a:r>
-            <a:r>
-              <a:rPr lang="en-US" sz="1250" i="1" dirty="0">
-                <a:solidFill>
-                  <a:srgbClr val="2B2B2B"/>
-                </a:solidFill>
-                <a:latin typeface="Calibri" pitchFamily="34" charset="0"/>
-                <a:ea typeface="Calibri" pitchFamily="34" charset="-122"/>
-                <a:cs typeface="Calibri" pitchFamily="34" charset="-120"/>
-              </a:rPr>
-              <a:t>A ring of parking spots, cars leave from any spot, next car takes the nearest free one going forward — stack, linear queue, or circular queue?</a:t>
-            </a:r>
-            <a:endParaRPr lang="en-US" sz="1200" dirty="0"/>
-          </a:p>
-        </p:txBody>
-      </p:sp>
     </p:spTree>
   </p:cSld>
   <p:clrMapOvr>
@@ -7293,45 +7209,6 @@
           </a:p>
         </p:txBody>
       </p:sp>
-      <p:sp>
-        <p:nvSpPr>
-          <p:cNvPr id="7" name="Text 5"/>
-          <p:cNvSpPr/>
-          <p:nvPr/>
-        </p:nvSpPr>
-        <p:spPr>
-          <a:xfrm>
-            <a:off x="640080" y="4800600"/>
-            <a:ext cx="7863840" cy="274320"/>
-          </a:xfrm>
-          <a:prstGeom prst="rect">
-            <a:avLst/>
-          </a:prstGeom>
-          <a:noFill/>
-          <a:ln/>
-        </p:spPr>
-        <p:txBody>
-          <a:bodyPr wrap="square" lIns="0" tIns="0" rIns="0" bIns="0" rtlCol="0" anchor="ctr"/>
-          <a:lstStyle/>
-          <a:p>
-            <a:pPr marL="0" indent="0">
-              <a:buNone/>
-            </a:pPr>
-            <a:r>
-              <a:rPr lang="en-US" sz="1100" i="1" dirty="0">
-                <a:solidFill>
-                  <a:srgbClr val="CADCFC"/>
-                </a:solidFill>
-                <a:latin typeface="Calibri" pitchFamily="34" charset="0"/>
-                <a:ea typeface="Calibri" pitchFamily="34" charset="-122"/>
-                <a:cs typeface="Calibri" pitchFamily="34" charset="-120"/>
-              </a:rPr>
-              <a:t>Next lecture: deque, priority queue, and the linked representation of queues</a:t>
-            </a:r>
-            <a:endParaRPr lang="en-US" sz="1100" dirty="0"/>
-          </a:p>
-        </p:txBody>
-      </p:sp>
     </p:spTree>
   </p:cSld>
   <p:clrMapOvr>
@@ -7683,90 +7560,6 @@
           </a:p>
         </p:txBody>
       </p:sp>
-      <p:sp>
-        <p:nvSpPr>
-          <p:cNvPr id="9" name="Shape 7"/>
-          <p:cNvSpPr/>
-          <p:nvPr/>
-        </p:nvSpPr>
-        <p:spPr>
-          <a:xfrm>
-            <a:off x="457200" y="4160520"/>
-            <a:ext cx="8229600" cy="502920"/>
-          </a:xfrm>
-          <a:prstGeom prst="roundRect">
-            <a:avLst>
-              <a:gd name="adj" fmla="val 12727"/>
-            </a:avLst>
-          </a:prstGeom>
-          <a:solidFill>
-            <a:srgbClr val="EEF3FB"/>
-          </a:solidFill>
-          <a:ln w="12700">
-            <a:solidFill>
-              <a:srgbClr val="1E2761"/>
-            </a:solidFill>
-            <a:prstDash val="solid"/>
-          </a:ln>
-        </p:spPr>
-        <p:txBody>
-          <a:bodyPr/>
-          <a:lstStyle/>
-          <a:p>
-            <a:endParaRPr lang="en-IN"/>
-          </a:p>
-        </p:txBody>
-      </p:sp>
-      <p:sp>
-        <p:nvSpPr>
-          <p:cNvPr id="10" name="Text 8"/>
-          <p:cNvSpPr/>
-          <p:nvPr/>
-        </p:nvSpPr>
-        <p:spPr>
-          <a:xfrm>
-            <a:off x="640080" y="4160520"/>
-            <a:ext cx="7863840" cy="502920"/>
-          </a:xfrm>
-          <a:prstGeom prst="rect">
-            <a:avLst/>
-          </a:prstGeom>
-          <a:noFill/>
-          <a:ln/>
-        </p:spPr>
-        <p:txBody>
-          <a:bodyPr wrap="square" lIns="0" tIns="0" rIns="0" bIns="0" rtlCol="0" anchor="ctr"/>
-          <a:lstStyle/>
-          <a:p>
-            <a:pPr marL="0" indent="0">
-              <a:buNone/>
-            </a:pPr>
-            <a:r>
-              <a:rPr lang="en-US" sz="1200" b="1" dirty="0">
-                <a:solidFill>
-                  <a:srgbClr val="1E2761"/>
-                </a:solidFill>
-                <a:latin typeface="Calibri" pitchFamily="34" charset="0"/>
-                <a:ea typeface="Calibri" pitchFamily="34" charset="-122"/>
-                <a:cs typeface="Calibri" pitchFamily="34" charset="-120"/>
-              </a:rPr>
-              <a:t>ASK   </a:t>
-            </a:r>
-            <a:r>
-              <a:rPr lang="en-US" sz="1250" i="1" dirty="0">
-                <a:solidFill>
-                  <a:srgbClr val="2B2B2B"/>
-                </a:solidFill>
-                <a:latin typeface="Calibri" pitchFamily="34" charset="0"/>
-                <a:ea typeface="Calibri" pitchFamily="34" charset="-122"/>
-                <a:cs typeface="Calibri" pitchFamily="34" charset="-120"/>
-              </a:rPr>
-              <a:t>If you could move rear anywhere, which empty slot would you put the next element in?</a:t>
-            </a:r>
-            <a:endParaRPr lang="en-US" sz="1200" dirty="0"/>
-          </a:p>
-        </p:txBody>
-      </p:sp>
     </p:spTree>
   </p:cSld>
   <p:clrMapOvr>
@@ -8787,90 +8580,6 @@
           </a:p>
         </p:txBody>
       </p:sp>
-      <p:sp>
-        <p:nvSpPr>
-          <p:cNvPr id="9" name="Shape 7"/>
-          <p:cNvSpPr/>
-          <p:nvPr/>
-        </p:nvSpPr>
-        <p:spPr>
-          <a:xfrm>
-            <a:off x="457200" y="4160520"/>
-            <a:ext cx="8229600" cy="502920"/>
-          </a:xfrm>
-          <a:prstGeom prst="roundRect">
-            <a:avLst>
-              <a:gd name="adj" fmla="val 12727"/>
-            </a:avLst>
-          </a:prstGeom>
-          <a:solidFill>
-            <a:srgbClr val="EEF3FB"/>
-          </a:solidFill>
-          <a:ln w="12700">
-            <a:solidFill>
-              <a:srgbClr val="1E2761"/>
-            </a:solidFill>
-            <a:prstDash val="solid"/>
-          </a:ln>
-        </p:spPr>
-        <p:txBody>
-          <a:bodyPr/>
-          <a:lstStyle/>
-          <a:p>
-            <a:endParaRPr lang="en-IN"/>
-          </a:p>
-        </p:txBody>
-      </p:sp>
-      <p:sp>
-        <p:nvSpPr>
-          <p:cNvPr id="10" name="Text 8"/>
-          <p:cNvSpPr/>
-          <p:nvPr/>
-        </p:nvSpPr>
-        <p:spPr>
-          <a:xfrm>
-            <a:off x="640080" y="4160520"/>
-            <a:ext cx="7863840" cy="502920"/>
-          </a:xfrm>
-          <a:prstGeom prst="rect">
-            <a:avLst/>
-          </a:prstGeom>
-          <a:noFill/>
-          <a:ln/>
-        </p:spPr>
-        <p:txBody>
-          <a:bodyPr wrap="square" lIns="0" tIns="0" rIns="0" bIns="0" rtlCol="0" anchor="ctr"/>
-          <a:lstStyle/>
-          <a:p>
-            <a:pPr marL="0" indent="0">
-              <a:buNone/>
-            </a:pPr>
-            <a:r>
-              <a:rPr lang="en-US" sz="1200" b="1" dirty="0">
-                <a:solidFill>
-                  <a:srgbClr val="1E2761"/>
-                </a:solidFill>
-                <a:latin typeface="Calibri" pitchFamily="34" charset="0"/>
-                <a:ea typeface="Calibri" pitchFamily="34" charset="-122"/>
-                <a:cs typeface="Calibri" pitchFamily="34" charset="-120"/>
-              </a:rPr>
-              <a:t>ASK   </a:t>
-            </a:r>
-            <a:r>
-              <a:rPr lang="en-US" sz="1250" i="1" dirty="0">
-                <a:solidFill>
-                  <a:srgbClr val="2B2B2B"/>
-                </a:solidFill>
-                <a:latin typeface="Calibri" pitchFamily="34" charset="0"/>
-                <a:ea typeface="Calibri" pitchFamily="34" charset="-122"/>
-                <a:cs typeface="Calibri" pitchFamily="34" charset="-120"/>
-              </a:rPr>
-              <a:t>MAX = 5. What is (4 + 1) % 5?  What is (2 + 1) % 5?</a:t>
-            </a:r>
-            <a:endParaRPr lang="en-US" sz="1200" dirty="0"/>
-          </a:p>
-        </p:txBody>
-      </p:sp>
     </p:spTree>
   </p:cSld>
   <p:clrMapOvr>
@@ -10612,90 +10321,6 @@
               <a:t>That one % is what lets rear reuse a freed slot instead of refusing to move.</a:t>
             </a:r>
             <a:endParaRPr lang="en-US" sz="1300" dirty="0"/>
-          </a:p>
-        </p:txBody>
-      </p:sp>
-      <p:sp>
-        <p:nvSpPr>
-          <p:cNvPr id="9" name="Shape 7"/>
-          <p:cNvSpPr/>
-          <p:nvPr/>
-        </p:nvSpPr>
-        <p:spPr>
-          <a:xfrm>
-            <a:off x="5486400" y="4114800"/>
-            <a:ext cx="3200400" cy="822960"/>
-          </a:xfrm>
-          <a:prstGeom prst="roundRect">
-            <a:avLst>
-              <a:gd name="adj" fmla="val 7778"/>
-            </a:avLst>
-          </a:prstGeom>
-          <a:solidFill>
-            <a:srgbClr val="EEF3FB"/>
-          </a:solidFill>
-          <a:ln w="12700">
-            <a:solidFill>
-              <a:srgbClr val="1E2761"/>
-            </a:solidFill>
-            <a:prstDash val="solid"/>
-          </a:ln>
-        </p:spPr>
-        <p:txBody>
-          <a:bodyPr/>
-          <a:lstStyle/>
-          <a:p>
-            <a:endParaRPr lang="en-IN"/>
-          </a:p>
-        </p:txBody>
-      </p:sp>
-      <p:sp>
-        <p:nvSpPr>
-          <p:cNvPr id="10" name="Text 8"/>
-          <p:cNvSpPr/>
-          <p:nvPr/>
-        </p:nvSpPr>
-        <p:spPr>
-          <a:xfrm>
-            <a:off x="5669280" y="4114800"/>
-            <a:ext cx="2834640" cy="822960"/>
-          </a:xfrm>
-          <a:prstGeom prst="rect">
-            <a:avLst/>
-          </a:prstGeom>
-          <a:noFill/>
-          <a:ln/>
-        </p:spPr>
-        <p:txBody>
-          <a:bodyPr wrap="square" lIns="0" tIns="0" rIns="0" bIns="0" rtlCol="0" anchor="ctr"/>
-          <a:lstStyle/>
-          <a:p>
-            <a:pPr marL="0" indent="0">
-              <a:buNone/>
-            </a:pPr>
-            <a:r>
-              <a:rPr lang="en-US" sz="1200" b="1" dirty="0">
-                <a:solidFill>
-                  <a:srgbClr val="1E2761"/>
-                </a:solidFill>
-                <a:latin typeface="Calibri" pitchFamily="34" charset="0"/>
-                <a:ea typeface="Calibri" pitchFamily="34" charset="-122"/>
-                <a:cs typeface="Calibri" pitchFamily="34" charset="-120"/>
-              </a:rPr>
-              <a:t>ASK   </a:t>
-            </a:r>
-            <a:r>
-              <a:rPr lang="en-US" sz="1250" i="1" dirty="0">
-                <a:solidFill>
-                  <a:srgbClr val="2B2B2B"/>
-                </a:solidFill>
-                <a:latin typeface="Calibri" pitchFamily="34" charset="0"/>
-                <a:ea typeface="Calibri" pitchFamily="34" charset="-122"/>
-                <a:cs typeface="Calibri" pitchFamily="34" charset="-120"/>
-              </a:rPr>
-              <a:t>front=2, rear=4, MAX=5. Trace (rear + 1) % MAX. Which array index gets the new element?</a:t>
-            </a:r>
-            <a:endParaRPr lang="en-US" sz="1200" dirty="0"/>
           </a:p>
         </p:txBody>
       </p:sp>
